--- a/apple-design-system-template.pptx
+++ b/apple-design-system-template.pptx
@@ -136,27 +136,32 @@
               <c:strCache>
                 <c:ptCount val="1"/>
                 <c:pt idx="0">
-                  <c:v>Product Revenue</c:v>
+                  <c:v>Product A</c:v>
                 </c:pt>
               </c:strCache>
             </c:strRef>
           </c:tx>
+          <c:spPr>
+            <a:solidFill>
+              <a:srgbClr val="0066CC"/>
+            </a:solidFill>
+          </c:spPr>
           <c:cat>
             <c:strRef>
               <c:f>Sheet1!$A$2:$A$5</c:f>
               <c:strCache>
                 <c:ptCount val="4"/>
                 <c:pt idx="0">
-                  <c:v>Q1</c:v>
+                  <c:v>Q1 2024</c:v>
                 </c:pt>
                 <c:pt idx="1">
-                  <c:v>Q2</c:v>
+                  <c:v>Q2 2024</c:v>
                 </c:pt>
                 <c:pt idx="2">
-                  <c:v>Q3</c:v>
+                  <c:v>Q3 2024</c:v>
                 </c:pt>
                 <c:pt idx="3">
-                  <c:v>Q4</c:v>
+                  <c:v>Q4 2024</c:v>
                 </c:pt>
               </c:strCache>
             </c:strRef>
@@ -171,22 +176,17 @@
                   <c:v>42</c:v>
                 </c:pt>
                 <c:pt idx="1">
+                  <c:v>67</c:v>
+                </c:pt>
+                <c:pt idx="2">
                   <c:v>58</c:v>
                 </c:pt>
-                <c:pt idx="2">
-                  <c:v>67</c:v>
-                </c:pt>
                 <c:pt idx="3">
-                  <c:v>81</c:v>
+                  <c:v>83</c:v>
                 </c:pt>
               </c:numCache>
             </c:numRef>
           </c:val>
-          <c:spPr>
-            <a:solidFill>
-              <a:srgbClr val="0066CC"/>
-            </a:solidFill>
-          </c:spPr>
         </c:ser>
         <c:ser>
           <c:idx val="1"/>
@@ -197,27 +197,32 @@
               <c:strCache>
                 <c:ptCount val="1"/>
                 <c:pt idx="0">
-                  <c:v>Service Revenue</c:v>
+                  <c:v>Product B</c:v>
                 </c:pt>
               </c:strCache>
             </c:strRef>
           </c:tx>
+          <c:spPr>
+            <a:solidFill>
+              <a:srgbClr val="2997FF"/>
+            </a:solidFill>
+          </c:spPr>
           <c:cat>
             <c:strRef>
               <c:f>Sheet1!$A$2:$A$5</c:f>
               <c:strCache>
                 <c:ptCount val="4"/>
                 <c:pt idx="0">
-                  <c:v>Q1</c:v>
+                  <c:v>Q1 2024</c:v>
                 </c:pt>
                 <c:pt idx="1">
-                  <c:v>Q2</c:v>
+                  <c:v>Q2 2024</c:v>
                 </c:pt>
                 <c:pt idx="2">
-                  <c:v>Q3</c:v>
+                  <c:v>Q3 2024</c:v>
                 </c:pt>
                 <c:pt idx="3">
-                  <c:v>Q4</c:v>
+                  <c:v>Q4 2024</c:v>
                 </c:pt>
               </c:strCache>
             </c:strRef>
@@ -229,25 +234,20 @@
                 <c:formatCode>General</c:formatCode>
                 <c:ptCount val="4"/>
                 <c:pt idx="0">
-                  <c:v>18</c:v>
+                  <c:v>28</c:v>
                 </c:pt>
                 <c:pt idx="1">
-                  <c:v>24</c:v>
+                  <c:v>45</c:v>
                 </c:pt>
                 <c:pt idx="2">
-                  <c:v>31</c:v>
+                  <c:v>71</c:v>
                 </c:pt>
                 <c:pt idx="3">
-                  <c:v>40</c:v>
+                  <c:v>62</c:v>
                 </c:pt>
               </c:numCache>
             </c:numRef>
           </c:val>
-          <c:spPr>
-            <a:solidFill>
-              <a:srgbClr val="2997FF"/>
-            </a:solidFill>
-          </c:spPr>
         </c:ser>
         <c:axId val="-2068027336"/>
         <c:axId val="-2113994440"/>
@@ -281,15 +281,8 @@
         <c:crossAx val="-2068027336"/>
         <c:crosses val="autoZero"/>
       </c:valAx>
-      <c:spPr>
-        <a:solidFill>
-          <a:srgbClr val="FFFFFF"/>
-        </a:solidFill>
-      </c:spPr>
     </c:plotArea>
-    <c:legend>
-      <c:legendPos val="tr"/>
-    </c:legend>
+    <c:legend/>
     <c:dispBlanksAs val="gap"/>
   </c:chart>
   <c:txPr>
@@ -326,11 +319,18 @@
               <c:strCache>
                 <c:ptCount val="1"/>
                 <c:pt idx="0">
-                  <c:v>Mobile</c:v>
+                  <c:v>Revenue</c:v>
                 </c:pt>
               </c:strCache>
             </c:strRef>
           </c:tx>
+          <c:spPr>
+            <a:ln w="31750">
+              <a:solidFill>
+                <a:srgbClr val="0066CC"/>
+              </a:solidFill>
+            </a:ln>
+          </c:spPr>
           <c:marker>
             <c:symbol val="none"/>
           </c:marker>
@@ -367,34 +367,27 @@
                 <c:formatCode>General</c:formatCode>
                 <c:ptCount val="6"/>
                 <c:pt idx="0">
-                  <c:v>12</c:v>
+                  <c:v>100</c:v>
                 </c:pt>
                 <c:pt idx="1">
-                  <c:v>19</c:v>
+                  <c:v>118</c:v>
                 </c:pt>
                 <c:pt idx="2">
-                  <c:v>23</c:v>
+                  <c:v>132</c:v>
                 </c:pt>
                 <c:pt idx="3">
-                  <c:v>31</c:v>
+                  <c:v>145</c:v>
                 </c:pt>
                 <c:pt idx="4">
-                  <c:v>38</c:v>
+                  <c:v>162</c:v>
                 </c:pt>
                 <c:pt idx="5">
-                  <c:v>45</c:v>
+                  <c:v>189</c:v>
                 </c:pt>
               </c:numCache>
             </c:numRef>
           </c:val>
           <c:smooth val="0"/>
-          <c:spPr>
-            <a:ln w="25400">
-              <a:solidFill>
-                <a:srgbClr val="0066CC"/>
-              </a:solidFill>
-            </a:ln>
-          </c:spPr>
         </c:ser>
         <c:ser>
           <c:idx val="1"/>
@@ -405,11 +398,18 @@
               <c:strCache>
                 <c:ptCount val="1"/>
                 <c:pt idx="0">
-                  <c:v>Desktop</c:v>
+                  <c:v>Users</c:v>
                 </c:pt>
               </c:strCache>
             </c:strRef>
           </c:tx>
+          <c:spPr>
+            <a:ln w="31750">
+              <a:solidFill>
+                <a:srgbClr val="0071E3"/>
+              </a:solidFill>
+            </a:ln>
+          </c:spPr>
           <c:marker>
             <c:symbol val="none"/>
           </c:marker>
@@ -446,34 +446,27 @@
                 <c:formatCode>General</c:formatCode>
                 <c:ptCount val="6"/>
                 <c:pt idx="0">
-                  <c:v>20</c:v>
+                  <c:v>80</c:v>
                 </c:pt>
                 <c:pt idx="1">
-                  <c:v>22</c:v>
+                  <c:v>95</c:v>
                 </c:pt>
                 <c:pt idx="2">
-                  <c:v>25</c:v>
+                  <c:v>110</c:v>
                 </c:pt>
                 <c:pt idx="3">
-                  <c:v>27</c:v>
+                  <c:v>128</c:v>
                 </c:pt>
                 <c:pt idx="4">
-                  <c:v>30</c:v>
+                  <c:v>150</c:v>
                 </c:pt>
                 <c:pt idx="5">
-                  <c:v>34</c:v>
+                  <c:v>175</c:v>
                 </c:pt>
               </c:numCache>
             </c:numRef>
           </c:val>
           <c:smooth val="0"/>
-          <c:spPr>
-            <a:ln w="25400">
-              <a:solidFill>
-                <a:srgbClr val="0071E3"/>
-              </a:solidFill>
-            </a:ln>
-          </c:spPr>
         </c:ser>
         <c:marker val="1"/>
         <c:smooth val="0"/>
@@ -511,7 +504,7 @@
       </c:valAx>
     </c:plotArea>
     <c:legend>
-      <c:legendPos val="tr"/>
+      <c:legendPos val="r"/>
       <c:layout/>
       <c:overlay val="0"/>
     </c:legend>
@@ -551,30 +544,70 @@
               <c:strCache>
                 <c:ptCount val="1"/>
                 <c:pt idx="0">
-                  <c:v>Share</c:v>
+                  <c:v>Revenue Share</c:v>
                 </c:pt>
               </c:strCache>
             </c:strRef>
           </c:tx>
+          <c:dPt>
+            <c:idx val="0"/>
+            <c:spPr>
+              <a:solidFill>
+                <a:srgbClr val="0066CC"/>
+              </a:solidFill>
+            </c:spPr>
+          </c:dPt>
+          <c:dPt>
+            <c:idx val="1"/>
+            <c:spPr>
+              <a:solidFill>
+                <a:srgbClr val="2997FF"/>
+              </a:solidFill>
+            </c:spPr>
+          </c:dPt>
+          <c:dPt>
+            <c:idx val="2"/>
+            <c:spPr>
+              <a:solidFill>
+                <a:srgbClr val="0071E3"/>
+              </a:solidFill>
+            </c:spPr>
+          </c:dPt>
+          <c:dPt>
+            <c:idx val="3"/>
+            <c:spPr>
+              <a:solidFill>
+                <a:srgbClr val="CCCCCC"/>
+              </a:solidFill>
+            </c:spPr>
+          </c:dPt>
+          <c:dPt>
+            <c:idx val="4"/>
+            <c:spPr>
+              <a:solidFill>
+                <a:srgbClr val="F5F5F7"/>
+              </a:solidFill>
+            </c:spPr>
+          </c:dPt>
           <c:cat>
             <c:strRef>
               <c:f>Sheet1!$A$2:$A$6</c:f>
               <c:strCache>
                 <c:ptCount val="5"/>
                 <c:pt idx="0">
-                  <c:v>Hardware</c:v>
+                  <c:v>iPhone</c:v>
                 </c:pt>
                 <c:pt idx="1">
-                  <c:v>Software</c:v>
+                  <c:v>Mac</c:v>
                 </c:pt>
                 <c:pt idx="2">
-                  <c:v>Services</c:v>
+                  <c:v>iPad</c:v>
                 </c:pt>
                 <c:pt idx="3">
-                  <c:v>Licensing</c:v>
+                  <c:v>Wearables</c:v>
                 </c:pt>
                 <c:pt idx="4">
-                  <c:v>Other</c:v>
+                  <c:v>Services</c:v>
                 </c:pt>
               </c:strCache>
             </c:strRef>
@@ -586,46 +619,27 @@
                 <c:formatCode>General</c:formatCode>
                 <c:ptCount val="5"/>
                 <c:pt idx="0">
-                  <c:v>35</c:v>
+                  <c:v>38</c:v>
                 </c:pt>
                 <c:pt idx="1">
-                  <c:v>25</c:v>
+                  <c:v>14</c:v>
                 </c:pt>
                 <c:pt idx="2">
-                  <c:v>20</c:v>
+                  <c:v>9</c:v>
                 </c:pt>
                 <c:pt idx="3">
-                  <c:v>12</c:v>
+                  <c:v>11</c:v>
                 </c:pt>
                 <c:pt idx="4">
-                  <c:v>8</c:v>
+                  <c:v>28</c:v>
                 </c:pt>
               </c:numCache>
             </c:numRef>
           </c:val>
-          <c:spPr>
-            <a:solidFill>
-              <a:srgbClr val="0066CC"/>
-            </a:solidFill>
-            <a:solidFill>
-              <a:srgbClr val="2997FF"/>
-            </a:solidFill>
-            <a:solidFill>
-              <a:srgbClr val="0071E3"/>
-            </a:solidFill>
-            <a:solidFill>
-              <a:srgbClr val="CCCCCC"/>
-            </a:solidFill>
-            <a:solidFill>
-              <a:srgbClr val="F5F5F7"/>
-            </a:solidFill>
-          </c:spPr>
         </c:ser>
       </c:pieChart>
     </c:plotArea>
-    <c:legend>
-      <c:legendPos val="tr"/>
-    </c:legend>
+    <c:legend/>
     <c:dispBlanksAs val="gap"/>
   </c:chart>
   <c:txPr>
@@ -3641,7 +3655,7 @@
         </p:nvSpPr>
         <p:spPr>
           <a:xfrm>
-            <a:off x="914400" y="1645920"/>
+            <a:off x="914400" y="2011680"/>
             <a:ext cx="10360152" cy="1097280"/>
           </a:xfrm>
           <a:prstGeom prst="rect">
@@ -3663,7 +3677,7 @@
                 </a:solidFill>
                 <a:latin typeface="Calibri"/>
               </a:rPr>
-              <a:t>Introducing the Future of Design</a:t>
+              <a:t>Apple Design System</a:t>
             </a:r>
           </a:p>
         </p:txBody>
@@ -3676,7 +3690,7 @@
         </p:nvSpPr>
         <p:spPr>
           <a:xfrm>
-            <a:off x="1371600" y="2834640"/>
+            <a:off x="1371600" y="3200400"/>
             <a:ext cx="9445752" cy="731520"/>
           </a:xfrm>
           <a:prstGeom prst="rect">
@@ -3698,7 +3712,7 @@
                 </a:solidFill>
                 <a:latin typeface="Calibri"/>
               </a:rPr>
-              <a:t>A comprehensive design language built for clarity, depth, and human connection.</a:t>
+              <a:t>A comprehensive presentation template built on Apple's visual language</a:t>
             </a:r>
           </a:p>
         </p:txBody>
@@ -3711,12 +3725,12 @@
         </p:nvSpPr>
         <p:spPr>
           <a:xfrm>
-            <a:off x="3904487" y="4855464"/>
-            <a:ext cx="1645920" cy="347472"/>
+            <a:off x="4265676" y="5097780"/>
+            <a:ext cx="1645920" cy="411480"/>
           </a:xfrm>
           <a:prstGeom prst="roundRect">
             <a:avLst>
-              <a:gd name="adj" fmla="val 50000"/>
+              <a:gd name="adj" fmla="val 5000000000"/>
             </a:avLst>
           </a:prstGeom>
           <a:solidFill>
@@ -3746,7 +3760,7 @@
           <a:p>
             <a:pPr algn="ctr"/>
             <a:r>
-              <a:rPr sz="1000" b="1">
+              <a:rPr sz="1000" b="0">
                 <a:solidFill>
                   <a:srgbClr val="FFFFFF"/>
                 </a:solidFill>
@@ -3765,12 +3779,12 @@
         </p:nvSpPr>
         <p:spPr>
           <a:xfrm>
-            <a:off x="6638544" y="4855464"/>
-            <a:ext cx="1645920" cy="347472"/>
+            <a:off x="6277356" y="5097780"/>
+            <a:ext cx="1645920" cy="411480"/>
           </a:xfrm>
           <a:prstGeom prst="roundRect">
             <a:avLst>
-              <a:gd name="adj" fmla="val 50000"/>
+              <a:gd name="adj" fmla="val 5000000000"/>
             </a:avLst>
           </a:prstGeom>
           <a:solidFill>
@@ -3800,13 +3814,13 @@
           <a:p>
             <a:pPr algn="ctr"/>
             <a:r>
-              <a:rPr sz="1000" b="1">
+              <a:rPr sz="1000" b="0">
                 <a:solidFill>
                   <a:srgbClr val="FFFFFF"/>
                 </a:solidFill>
                 <a:latin typeface="Calibri"/>
               </a:rPr>
-              <a:t>Get Started →</a:t>
+              <a:t>Get Started</a:t>
             </a:r>
           </a:p>
         </p:txBody>
@@ -3845,7 +3859,7 @@
         </p:nvSpPr>
         <p:spPr>
           <a:xfrm>
-            <a:off x="457200" y="274320"/>
+            <a:off x="548640" y="640080"/>
             <a:ext cx="2743200" cy="1371600"/>
           </a:xfrm>
           <a:prstGeom prst="rect">
@@ -3861,7 +3875,7 @@
           <a:p>
             <a:pPr algn="l"/>
             <a:r>
-              <a:rPr sz="7200" b="0">
+              <a:rPr sz="7200" b="1">
                 <a:solidFill>
                   <a:srgbClr val="0066CC"/>
                 </a:solidFill>
@@ -3880,8 +3894,8 @@
         </p:nvSpPr>
         <p:spPr>
           <a:xfrm>
-            <a:off x="914400" y="1645920"/>
-            <a:ext cx="10360152" cy="1828800"/>
+            <a:off x="914400" y="2194560"/>
+            <a:ext cx="10360152" cy="1645920"/>
           </a:xfrm>
           <a:prstGeom prst="rect">
             <a:avLst/>
@@ -3916,7 +3930,7 @@
         </p:nvSpPr>
         <p:spPr>
           <a:xfrm>
-            <a:off x="914400" y="3566160"/>
+            <a:off x="914400" y="4023360"/>
             <a:ext cx="10360152" cy="548640"/>
           </a:xfrm>
           <a:prstGeom prst="rect">
@@ -3977,8 +3991,8 @@
         </p:nvSpPr>
         <p:spPr>
           <a:xfrm>
-            <a:off x="457200" y="274320"/>
-            <a:ext cx="11274552" cy="640080"/>
+            <a:off x="548640" y="365760"/>
+            <a:ext cx="11091672" cy="594360"/>
           </a:xfrm>
           <a:prstGeom prst="rect">
             <a:avLst/>
@@ -3991,7 +4005,7 @@
           </a:bodyPr>
           <a:lstStyle/>
           <a:p>
-            <a:pPr algn="l"/>
+            <a:pPr algn="ctr"/>
             <a:r>
               <a:rPr sz="2400" b="1">
                 <a:solidFill>
@@ -3999,7 +4013,7 @@
                 </a:solidFill>
                 <a:latin typeface="Calibri"/>
               </a:rPr>
-              <a:t>Light vs. Dark Experience</a:t>
+              <a:t>Side-by-Side Comparison</a:t>
             </a:r>
           </a:p>
         </p:txBody>
@@ -4012,8 +4026,8 @@
         </p:nvSpPr>
         <p:spPr>
           <a:xfrm>
-            <a:off x="457200" y="1097280"/>
-            <a:ext cx="5568696" cy="5303520"/>
+            <a:off x="457200" y="1188720"/>
+            <a:ext cx="5394960" cy="5029200"/>
           </a:xfrm>
           <a:prstGeom prst="rect">
             <a:avLst/>
@@ -4055,8 +4069,8 @@
         </p:nvSpPr>
         <p:spPr>
           <a:xfrm>
-            <a:off x="640080" y="1325880"/>
-            <a:ext cx="5202936" cy="457200"/>
+            <a:off x="640080" y="1463040"/>
+            <a:ext cx="5029200" cy="502920"/>
           </a:xfrm>
           <a:prstGeom prst="rect">
             <a:avLst/>
@@ -4077,7 +4091,7 @@
                 </a:solidFill>
                 <a:latin typeface="Calibri"/>
               </a:rPr>
-              <a:t>Light Mode</a:t>
+              <a:t>Option A</a:t>
             </a:r>
           </a:p>
         </p:txBody>
@@ -4090,8 +4104,8 @@
         </p:nvSpPr>
         <p:spPr>
           <a:xfrm>
-            <a:off x="640080" y="1965960"/>
-            <a:ext cx="5202936" cy="685800"/>
+            <a:off x="640080" y="2194560"/>
+            <a:ext cx="4937760" cy="548640"/>
           </a:xfrm>
           <a:prstGeom prst="rect">
             <a:avLst/>
@@ -4112,7 +4126,7 @@
                 </a:solidFill>
                 <a:latin typeface="Calibri"/>
               </a:rPr>
-              <a:t>• Optimised for bright, natural environments</a:t>
+              <a:t>• Clear and minimal interface design</a:t>
             </a:r>
           </a:p>
         </p:txBody>
@@ -4125,8 +4139,8 @@
         </p:nvSpPr>
         <p:spPr>
           <a:xfrm>
-            <a:off x="640080" y="2743200"/>
-            <a:ext cx="5202936" cy="685800"/>
+            <a:off x="640080" y="2926080"/>
+            <a:ext cx="4937760" cy="548640"/>
           </a:xfrm>
           <a:prstGeom prst="rect">
             <a:avLst/>
@@ -4147,7 +4161,7 @@
                 </a:solidFill>
                 <a:latin typeface="Calibri"/>
               </a:rPr>
-              <a:t>• High-contrast text on white backgrounds</a:t>
+              <a:t>• Optimized for everyday workflows</a:t>
             </a:r>
           </a:p>
         </p:txBody>
@@ -4160,8 +4174,8 @@
         </p:nvSpPr>
         <p:spPr>
           <a:xfrm>
-            <a:off x="640080" y="3520439"/>
-            <a:ext cx="5202936" cy="685800"/>
+            <a:off x="640080" y="3657600"/>
+            <a:ext cx="4937760" cy="548640"/>
           </a:xfrm>
           <a:prstGeom prst="rect">
             <a:avLst/>
@@ -4182,7 +4196,7 @@
                 </a:solidFill>
                 <a:latin typeface="Calibri"/>
               </a:rPr>
-              <a:t>• Ideal for document and reading tasks</a:t>
+              <a:t>• Seamless device integration</a:t>
             </a:r>
           </a:p>
         </p:txBody>
@@ -4195,8 +4209,8 @@
         </p:nvSpPr>
         <p:spPr>
           <a:xfrm>
-            <a:off x="6163056" y="1097280"/>
-            <a:ext cx="5568696" cy="5303520"/>
+            <a:off x="6336792" y="1188720"/>
+            <a:ext cx="5394960" cy="5029200"/>
           </a:xfrm>
           <a:prstGeom prst="rect">
             <a:avLst/>
@@ -4238,8 +4252,8 @@
         </p:nvSpPr>
         <p:spPr>
           <a:xfrm>
-            <a:off x="6345936" y="1325880"/>
-            <a:ext cx="5202936" cy="457200"/>
+            <a:off x="6519672" y="1463040"/>
+            <a:ext cx="5029200" cy="502920"/>
           </a:xfrm>
           <a:prstGeom prst="rect">
             <a:avLst/>
@@ -4260,7 +4274,7 @@
                 </a:solidFill>
                 <a:latin typeface="Calibri"/>
               </a:rPr>
-              <a:t>Dark Mode</a:t>
+              <a:t>Option B</a:t>
             </a:r>
           </a:p>
         </p:txBody>
@@ -4273,8 +4287,8 @@
         </p:nvSpPr>
         <p:spPr>
           <a:xfrm>
-            <a:off x="6345936" y="1965960"/>
-            <a:ext cx="5202936" cy="685800"/>
+            <a:off x="6519672" y="2194560"/>
+            <a:ext cx="4937760" cy="548640"/>
           </a:xfrm>
           <a:prstGeom prst="rect">
             <a:avLst/>
@@ -4295,7 +4309,7 @@
                 </a:solidFill>
                 <a:latin typeface="Calibri"/>
               </a:rPr>
-              <a:t>• Reduces eye strain in low-light settings</a:t>
+              <a:t>• Immersive dark mode experience</a:t>
             </a:r>
           </a:p>
         </p:txBody>
@@ -4308,8 +4322,8 @@
         </p:nvSpPr>
         <p:spPr>
           <a:xfrm>
-            <a:off x="6345936" y="2743200"/>
-            <a:ext cx="5202936" cy="685800"/>
+            <a:off x="6519672" y="2926080"/>
+            <a:ext cx="4937760" cy="548640"/>
           </a:xfrm>
           <a:prstGeom prst="rect">
             <a:avLst/>
@@ -4330,7 +4344,7 @@
                 </a:solidFill>
                 <a:latin typeface="Calibri"/>
               </a:rPr>
-              <a:t>• Vibrant accent colours pop on dark canvas</a:t>
+              <a:t>• Engineered for power users</a:t>
             </a:r>
           </a:p>
         </p:txBody>
@@ -4343,8 +4357,8 @@
         </p:nvSpPr>
         <p:spPr>
           <a:xfrm>
-            <a:off x="6345936" y="3520439"/>
-            <a:ext cx="5202936" cy="685800"/>
+            <a:off x="6519672" y="3657600"/>
+            <a:ext cx="4937760" cy="548640"/>
           </a:xfrm>
           <a:prstGeom prst="rect">
             <a:avLst/>
@@ -4365,7 +4379,7 @@
                 </a:solidFill>
                 <a:latin typeface="Calibri"/>
               </a:rPr>
-              <a:t>• Battery-friendly on OLED displays</a:t>
+              <a:t>• Advanced customization options</a:t>
             </a:r>
           </a:p>
         </p:txBody>
@@ -4404,8 +4418,8 @@
         </p:nvSpPr>
         <p:spPr>
           <a:xfrm>
-            <a:off x="457200" y="1645920"/>
-            <a:ext cx="11274552" cy="1188720"/>
+            <a:off x="914400" y="1645920"/>
+            <a:ext cx="10360152" cy="1188720"/>
           </a:xfrm>
           <a:prstGeom prst="rect">
             <a:avLst/>
@@ -4426,7 +4440,7 @@
                 </a:solidFill>
                 <a:latin typeface="Calibri"/>
               </a:rPr>
-              <a:t>Think Different.</a:t>
+              <a:t>The Future is Here.</a:t>
             </a:r>
           </a:p>
         </p:txBody>
@@ -4439,8 +4453,8 @@
         </p:nvSpPr>
         <p:spPr>
           <a:xfrm>
-            <a:off x="457200" y="2926080"/>
-            <a:ext cx="11274552" cy="731520"/>
+            <a:off x="1371600" y="2926080"/>
+            <a:ext cx="9445752" cy="731520"/>
           </a:xfrm>
           <a:prstGeom prst="rect">
             <a:avLst/>
@@ -4461,7 +4475,7 @@
                 </a:solidFill>
                 <a:latin typeface="Calibri"/>
               </a:rPr>
-              <a:t>Join millions of people who trust Apple design every day.</a:t>
+              <a:t>Join us in building the next generation of experiences.</a:t>
             </a:r>
           </a:p>
         </p:txBody>
@@ -4474,12 +4488,12 @@
         </p:nvSpPr>
         <p:spPr>
           <a:xfrm>
-            <a:off x="5088636" y="4823460"/>
-            <a:ext cx="2011680" cy="411480"/>
+            <a:off x="5088636" y="4800600"/>
+            <a:ext cx="2011680" cy="457200"/>
           </a:xfrm>
           <a:prstGeom prst="roundRect">
             <a:avLst>
-              <a:gd name="adj" fmla="val 50000"/>
+              <a:gd name="adj" fmla="val 5000000000"/>
             </a:avLst>
           </a:prstGeom>
           <a:solidFill>
@@ -4509,7 +4523,7 @@
           <a:p>
             <a:pPr algn="ctr"/>
             <a:r>
-              <a:rPr sz="1000" b="1">
+              <a:rPr sz="1200" b="0">
                 <a:solidFill>
                   <a:srgbClr val="FFFFFF"/>
                 </a:solidFill>
@@ -4554,7 +4568,7 @@
         </p:nvSpPr>
         <p:spPr>
           <a:xfrm>
-            <a:off x="914400" y="1828800"/>
+            <a:off x="914400" y="2011680"/>
             <a:ext cx="10360152" cy="1097280"/>
           </a:xfrm>
           <a:prstGeom prst="rect">
@@ -4576,7 +4590,7 @@
                 </a:solidFill>
                 <a:latin typeface="Calibri"/>
               </a:rPr>
-              <a:t>Designed for Everyone</a:t>
+              <a:t>Apple Design System</a:t>
             </a:r>
           </a:p>
         </p:txBody>
@@ -4589,7 +4603,7 @@
         </p:nvSpPr>
         <p:spPr>
           <a:xfrm>
-            <a:off x="1371600" y="3017520"/>
+            <a:off x="1371600" y="3200400"/>
             <a:ext cx="9445752" cy="731520"/>
           </a:xfrm>
           <a:prstGeom prst="rect">
@@ -4611,7 +4625,7 @@
                 </a:solidFill>
                 <a:latin typeface="Calibri"/>
               </a:rPr>
-              <a:t>Elegant, intentional, and built to last.</a:t>
+              <a:t>A comprehensive presentation template built on Apple's visual language</a:t>
             </a:r>
           </a:p>
         </p:txBody>
@@ -4650,8 +4664,8 @@
         </p:nvSpPr>
         <p:spPr>
           <a:xfrm>
-            <a:off x="640080" y="1280160"/>
-            <a:ext cx="2743200" cy="1097280"/>
+            <a:off x="914400" y="1371600"/>
+            <a:ext cx="3657600" cy="1097280"/>
           </a:xfrm>
           <a:prstGeom prst="rect">
             <a:avLst/>
@@ -4685,7 +4699,7 @@
         </p:nvSpPr>
         <p:spPr>
           <a:xfrm>
-            <a:off x="640080" y="2468880"/>
+            <a:off x="914400" y="2651760"/>
             <a:ext cx="7315200" cy="914400"/>
           </a:xfrm>
           <a:prstGeom prst="rect">
@@ -4707,7 +4721,7 @@
                 </a:solidFill>
                 <a:latin typeface="Calibri"/>
               </a:rPr>
-              <a:t>Design Foundations</a:t>
+              <a:t>Introduction to Design</a:t>
             </a:r>
           </a:p>
         </p:txBody>
@@ -4720,7 +4734,7 @@
         </p:nvSpPr>
         <p:spPr>
           <a:xfrm>
-            <a:off x="640080" y="3383280"/>
+            <a:off x="914400" y="3749039"/>
             <a:ext cx="7315200" cy="640080"/>
           </a:xfrm>
           <a:prstGeom prst="rect">
@@ -4742,7 +4756,7 @@
                 </a:solidFill>
                 <a:latin typeface="Calibri"/>
               </a:rPr>
-              <a:t>Principles that guide every pixel and every interaction.</a:t>
+              <a:t>Explore the principles that define our visual language</a:t>
             </a:r>
           </a:p>
         </p:txBody>
@@ -4781,8 +4795,8 @@
         </p:nvSpPr>
         <p:spPr>
           <a:xfrm>
-            <a:off x="548640" y="822960"/>
-            <a:ext cx="6766560" cy="731520"/>
+            <a:off x="548640" y="914400"/>
+            <a:ext cx="6766560" cy="640080"/>
           </a:xfrm>
           <a:prstGeom prst="rect">
             <a:avLst/>
@@ -4803,7 +4817,7 @@
                 </a:solidFill>
                 <a:latin typeface="Calibri"/>
               </a:rPr>
-              <a:t>Clarity Above All Else</a:t>
+              <a:t>Design Principles</a:t>
             </a:r>
           </a:p>
         </p:txBody>
@@ -4816,8 +4830,8 @@
         </p:nvSpPr>
         <p:spPr>
           <a:xfrm>
-            <a:off x="548640" y="1691640"/>
-            <a:ext cx="6583680" cy="4114800"/>
+            <a:off x="548640" y="1737360"/>
+            <a:ext cx="6766560" cy="3474720"/>
           </a:xfrm>
           <a:prstGeom prst="rect">
             <a:avLst/>
@@ -4838,8 +4852,8 @@
                 </a:solidFill>
                 <a:latin typeface="Calibri"/>
               </a:rPr>
-              <a:t>Every element on screen earns its place. Negative space breathes life into layouts, while careful typographic hierarchy guides the eye naturally from headline to supporting detail.
-Consistent colour application reinforces meaning—blue for action, white for openness, dark tiles for focus—so users always know where they are and what they can do next.</a:t>
+              <a:t>Apple's design language is rooted in clarity, deference, and depth. Every element is intentional, every interaction considered.
+Our visual system provides consistency across all touchpoints, ensuring that users always feel at home within our ecosystem.</a:t>
             </a:r>
           </a:p>
         </p:txBody>
@@ -4852,18 +4866,18 @@
         </p:nvSpPr>
         <p:spPr>
           <a:xfrm>
-            <a:off x="7589520" y="640080"/>
-            <a:ext cx="4023360" cy="5394960"/>
+            <a:off x="7680960" y="822960"/>
+            <a:ext cx="3931920" cy="4937760"/>
           </a:xfrm>
           <a:prstGeom prst="roundRect">
             <a:avLst>
-              <a:gd name="adj" fmla="val 5000"/>
+              <a:gd name="adj" fmla="val 500000000"/>
             </a:avLst>
           </a:prstGeom>
           <a:solidFill>
             <a:srgbClr val="E0E0E0"/>
           </a:solidFill>
-          <a:ln w="9525">
+          <a:ln w="6350">
             <a:solidFill>
               <a:srgbClr val="E0E0E0"/>
             </a:solidFill>
@@ -4899,8 +4913,8 @@
         </p:nvSpPr>
         <p:spPr>
           <a:xfrm>
-            <a:off x="7589520" y="3017520"/>
-            <a:ext cx="4023360" cy="457200"/>
+            <a:off x="7680960" y="3017520"/>
+            <a:ext cx="3931920" cy="457200"/>
           </a:xfrm>
           <a:prstGeom prst="rect">
             <a:avLst/>
@@ -4915,13 +4929,13 @@
           <a:p>
             <a:pPr algn="ctr"/>
             <a:r>
-              <a:rPr sz="1000" b="0">
+              <a:rPr sz="1200" b="0">
                 <a:solidFill>
-                  <a:srgbClr val="999999"/>
+                  <a:srgbClr val="CCCCCC"/>
                 </a:solidFill>
                 <a:latin typeface="Calibri"/>
               </a:rPr>
-              <a:t>Image / Media</a:t>
+              <a:t>Image Placeholder</a:t>
             </a:r>
           </a:p>
         </p:txBody>
@@ -4960,8 +4974,8 @@
         </p:nvSpPr>
         <p:spPr>
           <a:xfrm>
-            <a:off x="640080" y="457200"/>
-            <a:ext cx="10908792" cy="731520"/>
+            <a:off x="731520" y="640080"/>
+            <a:ext cx="10725912" cy="640080"/>
           </a:xfrm>
           <a:prstGeom prst="rect">
             <a:avLst/>
@@ -4982,7 +4996,7 @@
                 </a:solidFill>
                 <a:latin typeface="Calibri"/>
               </a:rPr>
-              <a:t>Key Principles</a:t>
+              <a:t>Key Features &amp; Benefits</a:t>
             </a:r>
           </a:p>
         </p:txBody>
@@ -4995,8 +5009,8 @@
         </p:nvSpPr>
         <p:spPr>
           <a:xfrm>
-            <a:off x="640080" y="1234440"/>
-            <a:ext cx="10908792" cy="18288"/>
+            <a:off x="731520" y="1417320"/>
+            <a:ext cx="10725912" cy="12700"/>
           </a:xfrm>
           <a:prstGeom prst="rect">
             <a:avLst/>
@@ -5038,7 +5052,7 @@
         </p:nvSpPr>
         <p:spPr>
           <a:xfrm>
-            <a:off x="658368" y="1490472"/>
+            <a:off x="731520" y="1764792"/>
             <a:ext cx="109728" cy="109728"/>
           </a:xfrm>
           <a:prstGeom prst="rect">
@@ -5081,8 +5095,8 @@
         </p:nvSpPr>
         <p:spPr>
           <a:xfrm>
-            <a:off x="914400" y="1417320"/>
-            <a:ext cx="10607040" cy="777240"/>
+            <a:off x="1005840" y="1691640"/>
+            <a:ext cx="10058400" cy="640080"/>
           </a:xfrm>
           <a:prstGeom prst="rect">
             <a:avLst/>
@@ -5103,7 +5117,7 @@
                 </a:solidFill>
                 <a:latin typeface="Calibri"/>
               </a:rPr>
-              <a:t>Hierarchy — every element has a clear visual rank that guides the reader effortlessly.</a:t>
+              <a:t>Clarity — Remove complexity, let content speak for itself</a:t>
             </a:r>
           </a:p>
         </p:txBody>
@@ -5116,7 +5130,7 @@
         </p:nvSpPr>
         <p:spPr>
           <a:xfrm>
-            <a:off x="658368" y="2404872"/>
+            <a:off x="731520" y="2633472"/>
             <a:ext cx="109728" cy="109728"/>
           </a:xfrm>
           <a:prstGeom prst="rect">
@@ -5159,8 +5173,8 @@
         </p:nvSpPr>
         <p:spPr>
           <a:xfrm>
-            <a:off x="914400" y="2331720"/>
-            <a:ext cx="10607040" cy="777240"/>
+            <a:off x="1005840" y="2560320"/>
+            <a:ext cx="10058400" cy="640080"/>
           </a:xfrm>
           <a:prstGeom prst="rect">
             <a:avLst/>
@@ -5181,7 +5195,7 @@
                 </a:solidFill>
                 <a:latin typeface="Calibri"/>
               </a:rPr>
-              <a:t>Consistency — repeated patterns build familiarity and reduce cognitive load.</a:t>
+              <a:t>Deference — UI supports without competing with content</a:t>
             </a:r>
           </a:p>
         </p:txBody>
@@ -5194,7 +5208,7 @@
         </p:nvSpPr>
         <p:spPr>
           <a:xfrm>
-            <a:off x="658368" y="3319272"/>
+            <a:off x="731520" y="3502152"/>
             <a:ext cx="109728" cy="109728"/>
           </a:xfrm>
           <a:prstGeom prst="rect">
@@ -5237,8 +5251,8 @@
         </p:nvSpPr>
         <p:spPr>
           <a:xfrm>
-            <a:off x="914400" y="3246120"/>
-            <a:ext cx="10607040" cy="777240"/>
+            <a:off x="1005840" y="3429000"/>
+            <a:ext cx="10058400" cy="640080"/>
           </a:xfrm>
           <a:prstGeom prst="rect">
             <a:avLst/>
@@ -5259,7 +5273,7 @@
                 </a:solidFill>
                 <a:latin typeface="Calibri"/>
               </a:rPr>
-              <a:t>Accessibility — minimum 4.5 : 1 contrast ratios ensure legibility for all users.</a:t>
+              <a:t>Depth — Visual layers create hierarchy and focus</a:t>
             </a:r>
           </a:p>
         </p:txBody>
@@ -5272,7 +5286,7 @@
         </p:nvSpPr>
         <p:spPr>
           <a:xfrm>
-            <a:off x="658368" y="4233672"/>
+            <a:off x="731520" y="4370832"/>
             <a:ext cx="109728" cy="109728"/>
           </a:xfrm>
           <a:prstGeom prst="rect">
@@ -5315,8 +5329,8 @@
         </p:nvSpPr>
         <p:spPr>
           <a:xfrm>
-            <a:off x="914400" y="4160520"/>
-            <a:ext cx="10607040" cy="777240"/>
+            <a:off x="1005840" y="4297680"/>
+            <a:ext cx="10058400" cy="640080"/>
           </a:xfrm>
           <a:prstGeom prst="rect">
             <a:avLst/>
@@ -5337,7 +5351,7 @@
                 </a:solidFill>
                 <a:latin typeface="Calibri"/>
               </a:rPr>
-              <a:t>Purposeful Motion — animations clarify state changes rather than decorate them.</a:t>
+              <a:t>Consistency — Predictable patterns build confidence</a:t>
             </a:r>
           </a:p>
         </p:txBody>
@@ -5350,7 +5364,7 @@
         </p:nvSpPr>
         <p:spPr>
           <a:xfrm>
-            <a:off x="658368" y="5148072"/>
+            <a:off x="731520" y="5239512"/>
             <a:ext cx="109728" cy="109728"/>
           </a:xfrm>
           <a:prstGeom prst="rect">
@@ -5393,8 +5407,8 @@
         </p:nvSpPr>
         <p:spPr>
           <a:xfrm>
-            <a:off x="914400" y="5074920"/>
-            <a:ext cx="10607040" cy="777240"/>
+            <a:off x="1005840" y="5166360"/>
+            <a:ext cx="10058400" cy="640080"/>
           </a:xfrm>
           <a:prstGeom prst="rect">
             <a:avLst/>
@@ -5415,7 +5429,7 @@
                 </a:solidFill>
                 <a:latin typeface="Calibri"/>
               </a:rPr>
-              <a:t>Economy — restraint in colour, type, and decoration lets content take centre stage.</a:t>
+              <a:t>Feedback — Every action has a clear, immediate response</a:t>
             </a:r>
           </a:p>
         </p:txBody>
@@ -5454,8 +5468,8 @@
         </p:nvSpPr>
         <p:spPr>
           <a:xfrm>
-            <a:off x="548640" y="274320"/>
-            <a:ext cx="11091672" cy="640080"/>
+            <a:off x="548640" y="365760"/>
+            <a:ext cx="10725912" cy="548640"/>
           </a:xfrm>
           <a:prstGeom prst="rect">
             <a:avLst/>
@@ -5476,7 +5490,7 @@
                 </a:solidFill>
                 <a:latin typeface="Calibri"/>
               </a:rPr>
-              <a:t>Quarterly Performance</a:t>
+              <a:t>Performance Metrics</a:t>
             </a:r>
           </a:p>
         </p:txBody>
@@ -5491,7 +5505,7 @@
         </p:nvGraphicFramePr>
         <p:xfrm>
           <a:off x="548640" y="1097280"/>
-          <a:ext cx="11091672" cy="5303520"/>
+          <a:ext cx="11091672" cy="5212080"/>
         </p:xfrm>
         <a:graphic>
           <a:graphicData uri="http://schemas.openxmlformats.org/drawingml/2006/chart">
@@ -5533,8 +5547,8 @@
         </p:nvSpPr>
         <p:spPr>
           <a:xfrm>
-            <a:off x="548640" y="274320"/>
-            <a:ext cx="11091672" cy="640080"/>
+            <a:off x="548640" y="365760"/>
+            <a:ext cx="10725912" cy="548640"/>
           </a:xfrm>
           <a:prstGeom prst="rect">
             <a:avLst/>
@@ -5555,7 +5569,7 @@
                 </a:solidFill>
                 <a:latin typeface="Calibri"/>
               </a:rPr>
-              <a:t>Monthly Active Users</a:t>
+              <a:t>Growth Trends</a:t>
             </a:r>
           </a:p>
         </p:txBody>
@@ -5570,7 +5584,7 @@
         </p:nvGraphicFramePr>
         <p:xfrm>
           <a:off x="548640" y="1097280"/>
-          <a:ext cx="11091672" cy="5303520"/>
+          <a:ext cx="11091672" cy="5212080"/>
         </p:xfrm>
         <a:graphic>
           <a:graphicData uri="http://schemas.openxmlformats.org/drawingml/2006/chart">
@@ -5612,8 +5626,8 @@
         </p:nvSpPr>
         <p:spPr>
           <a:xfrm>
-            <a:off x="548640" y="274320"/>
-            <a:ext cx="11091672" cy="640080"/>
+            <a:off x="548640" y="365760"/>
+            <a:ext cx="10725912" cy="548640"/>
           </a:xfrm>
           <a:prstGeom prst="rect">
             <a:avLst/>
@@ -5634,7 +5648,7 @@
                 </a:solidFill>
                 <a:latin typeface="Calibri"/>
               </a:rPr>
-              <a:t>Revenue by Segment</a:t>
+              <a:t>Market Distribution</a:t>
             </a:r>
           </a:p>
         </p:txBody>
@@ -5648,8 +5662,8 @@
           <p:nvPr/>
         </p:nvGraphicFramePr>
         <p:xfrm>
-          <a:off x="1371600" y="1097280"/>
-          <a:ext cx="9445752" cy="5303520"/>
+          <a:off x="1828800" y="914400"/>
+          <a:ext cx="8531352" cy="5486400"/>
         </p:xfrm>
         <a:graphic>
           <a:graphicData uri="http://schemas.openxmlformats.org/drawingml/2006/chart">
@@ -5691,8 +5705,8 @@
         </p:nvSpPr>
         <p:spPr>
           <a:xfrm>
-            <a:off x="548640" y="274320"/>
-            <a:ext cx="11091672" cy="640080"/>
+            <a:off x="548640" y="365760"/>
+            <a:ext cx="10725912" cy="548640"/>
           </a:xfrm>
           <a:prstGeom prst="rect">
             <a:avLst/>
@@ -5713,7 +5727,7 @@
                 </a:solidFill>
                 <a:latin typeface="Calibri"/>
               </a:rPr>
-              <a:t>Product Comparison</a:t>
+              <a:t>Quarterly Summary</a:t>
             </a:r>
           </a:p>
         </p:txBody>
@@ -5727,8 +5741,8 @@
           <p:nvPr/>
         </p:nvGraphicFramePr>
         <p:xfrm>
-          <a:off x="548640" y="1097280"/>
-          <a:ext cx="11091672" cy="5029200"/>
+          <a:off x="548640" y="1188720"/>
+          <a:ext cx="11091672" cy="4389120"/>
         </p:xfrm>
         <a:graphic>
           <a:graphicData uri="http://schemas.openxmlformats.org/drawingml/2006/table">
@@ -5737,12 +5751,12 @@
                 <a:tableStyleId>{5C22544A-7EE6-4342-B048-85BDC9FD1C3A}</a:tableStyleId>
               </a:tblPr>
               <a:tblGrid>
-                <a:gridCol w="2772918"/>
-                <a:gridCol w="2772918"/>
-                <a:gridCol w="2772918"/>
-                <a:gridCol w="2772918"/>
+                <a:gridCol w="3200400"/>
+                <a:gridCol w="2651760"/>
+                <a:gridCol w="2651760"/>
+                <a:gridCol w="2587752"/>
               </a:tblGrid>
-              <a:tr h="1005840">
+              <a:tr h="877824">
                 <a:tc>
                   <a:txBody>
                     <a:bodyPr/>
@@ -5756,7 +5770,7 @@
                           </a:solidFill>
                           <a:latin typeface="Calibri"/>
                         </a:rPr>
-                        <a:t>Feature</a:t>
+                        <a:t>Category</a:t>
                       </a:r>
                     </a:p>
                   </a:txBody>
@@ -5764,26 +5778,6 @@
                     <a:solidFill>
                       <a:srgbClr val="1D1D1F"/>
                     </a:solidFill>
-                    <a:lnL w="6350" cap="flat" cmpd="sng">
-                      <a:solidFill>
-                        <a:srgbClr val="E0E0E0"/>
-                      </a:solidFill>
-                    </a:lnL>
-                    <a:lnR w="6350" cap="flat" cmpd="sng">
-                      <a:solidFill>
-                        <a:srgbClr val="E0E0E0"/>
-                      </a:solidFill>
-                    </a:lnR>
-                    <a:lnT w="6350" cap="flat" cmpd="sng">
-                      <a:solidFill>
-                        <a:srgbClr val="E0E0E0"/>
-                      </a:solidFill>
-                    </a:lnT>
-                    <a:lnB w="6350" cap="flat" cmpd="sng">
-                      <a:solidFill>
-                        <a:srgbClr val="E0E0E0"/>
-                      </a:solidFill>
-                    </a:lnB>
                   </a:tcPr>
                 </a:tc>
                 <a:tc>
@@ -5799,7 +5793,7 @@
                           </a:solidFill>
                           <a:latin typeface="Calibri"/>
                         </a:rPr>
-                        <a:t>Starter</a:t>
+                        <a:t>Q1 2024</a:t>
                       </a:r>
                     </a:p>
                   </a:txBody>
@@ -5807,26 +5801,6 @@
                     <a:solidFill>
                       <a:srgbClr val="1D1D1F"/>
                     </a:solidFill>
-                    <a:lnL w="6350" cap="flat" cmpd="sng">
-                      <a:solidFill>
-                        <a:srgbClr val="E0E0E0"/>
-                      </a:solidFill>
-                    </a:lnL>
-                    <a:lnR w="6350" cap="flat" cmpd="sng">
-                      <a:solidFill>
-                        <a:srgbClr val="E0E0E0"/>
-                      </a:solidFill>
-                    </a:lnR>
-                    <a:lnT w="6350" cap="flat" cmpd="sng">
-                      <a:solidFill>
-                        <a:srgbClr val="E0E0E0"/>
-                      </a:solidFill>
-                    </a:lnT>
-                    <a:lnB w="6350" cap="flat" cmpd="sng">
-                      <a:solidFill>
-                        <a:srgbClr val="E0E0E0"/>
-                      </a:solidFill>
-                    </a:lnB>
                   </a:tcPr>
                 </a:tc>
                 <a:tc>
@@ -5842,7 +5816,7 @@
                           </a:solidFill>
                           <a:latin typeface="Calibri"/>
                         </a:rPr>
-                        <a:t>Professional</a:t>
+                        <a:t>Q2 2024</a:t>
                       </a:r>
                     </a:p>
                   </a:txBody>
@@ -5850,26 +5824,6 @@
                     <a:solidFill>
                       <a:srgbClr val="1D1D1F"/>
                     </a:solidFill>
-                    <a:lnL w="6350" cap="flat" cmpd="sng">
-                      <a:solidFill>
-                        <a:srgbClr val="E0E0E0"/>
-                      </a:solidFill>
-                    </a:lnL>
-                    <a:lnR w="6350" cap="flat" cmpd="sng">
-                      <a:solidFill>
-                        <a:srgbClr val="E0E0E0"/>
-                      </a:solidFill>
-                    </a:lnR>
-                    <a:lnT w="6350" cap="flat" cmpd="sng">
-                      <a:solidFill>
-                        <a:srgbClr val="E0E0E0"/>
-                      </a:solidFill>
-                    </a:lnT>
-                    <a:lnB w="6350" cap="flat" cmpd="sng">
-                      <a:solidFill>
-                        <a:srgbClr val="E0E0E0"/>
-                      </a:solidFill>
-                    </a:lnB>
                   </a:tcPr>
                 </a:tc>
                 <a:tc>
@@ -5885,7 +5839,7 @@
                           </a:solidFill>
                           <a:latin typeface="Calibri"/>
                         </a:rPr>
-                        <a:t>Enterprise</a:t>
+                        <a:t>Q3 2024</a:t>
                       </a:r>
                     </a:p>
                   </a:txBody>
@@ -5893,30 +5847,10 @@
                     <a:solidFill>
                       <a:srgbClr val="1D1D1F"/>
                     </a:solidFill>
-                    <a:lnL w="6350" cap="flat" cmpd="sng">
-                      <a:solidFill>
-                        <a:srgbClr val="E0E0E0"/>
-                      </a:solidFill>
-                    </a:lnL>
-                    <a:lnR w="6350" cap="flat" cmpd="sng">
-                      <a:solidFill>
-                        <a:srgbClr val="E0E0E0"/>
-                      </a:solidFill>
-                    </a:lnR>
-                    <a:lnT w="6350" cap="flat" cmpd="sng">
-                      <a:solidFill>
-                        <a:srgbClr val="E0E0E0"/>
-                      </a:solidFill>
-                    </a:lnT>
-                    <a:lnB w="6350" cap="flat" cmpd="sng">
-                      <a:solidFill>
-                        <a:srgbClr val="E0E0E0"/>
-                      </a:solidFill>
-                    </a:lnB>
                   </a:tcPr>
                 </a:tc>
               </a:tr>
-              <a:tr h="1005840">
+              <a:tr h="877824">
                 <a:tc>
                   <a:txBody>
                     <a:bodyPr/>
@@ -5930,7 +5864,7 @@
                           </a:solidFill>
                           <a:latin typeface="Calibri"/>
                         </a:rPr>
-                        <a:t>Storage</a:t>
+                        <a:t>iPhone</a:t>
                       </a:r>
                     </a:p>
                   </a:txBody>
@@ -5938,26 +5872,6 @@
                     <a:solidFill>
                       <a:srgbClr val="FFFFFF"/>
                     </a:solidFill>
-                    <a:lnL w="6350" cap="flat" cmpd="sng">
-                      <a:solidFill>
-                        <a:srgbClr val="E0E0E0"/>
-                      </a:solidFill>
-                    </a:lnL>
-                    <a:lnR w="6350" cap="flat" cmpd="sng">
-                      <a:solidFill>
-                        <a:srgbClr val="E0E0E0"/>
-                      </a:solidFill>
-                    </a:lnR>
-                    <a:lnT w="6350" cap="flat" cmpd="sng">
-                      <a:solidFill>
-                        <a:srgbClr val="E0E0E0"/>
-                      </a:solidFill>
-                    </a:lnT>
-                    <a:lnB w="6350" cap="flat" cmpd="sng">
-                      <a:solidFill>
-                        <a:srgbClr val="E0E0E0"/>
-                      </a:solidFill>
-                    </a:lnB>
                   </a:tcPr>
                 </a:tc>
                 <a:tc>
@@ -5973,7 +5887,7 @@
                           </a:solidFill>
                           <a:latin typeface="Calibri"/>
                         </a:rPr>
-                        <a:t>10 GB</a:t>
+                        <a:t>$51.3B</a:t>
                       </a:r>
                     </a:p>
                   </a:txBody>
@@ -5981,26 +5895,6 @@
                     <a:solidFill>
                       <a:srgbClr val="FFFFFF"/>
                     </a:solidFill>
-                    <a:lnL w="6350" cap="flat" cmpd="sng">
-                      <a:solidFill>
-                        <a:srgbClr val="E0E0E0"/>
-                      </a:solidFill>
-                    </a:lnL>
-                    <a:lnR w="6350" cap="flat" cmpd="sng">
-                      <a:solidFill>
-                        <a:srgbClr val="E0E0E0"/>
-                      </a:solidFill>
-                    </a:lnR>
-                    <a:lnT w="6350" cap="flat" cmpd="sng">
-                      <a:solidFill>
-                        <a:srgbClr val="E0E0E0"/>
-                      </a:solidFill>
-                    </a:lnT>
-                    <a:lnB w="6350" cap="flat" cmpd="sng">
-                      <a:solidFill>
-                        <a:srgbClr val="E0E0E0"/>
-                      </a:solidFill>
-                    </a:lnB>
                   </a:tcPr>
                 </a:tc>
                 <a:tc>
@@ -6016,7 +5910,7 @@
                           </a:solidFill>
                           <a:latin typeface="Calibri"/>
                         </a:rPr>
-                        <a:t>100 GB</a:t>
+                        <a:t>$55.1B</a:t>
                       </a:r>
                     </a:p>
                   </a:txBody>
@@ -6024,26 +5918,6 @@
                     <a:solidFill>
                       <a:srgbClr val="FFFFFF"/>
                     </a:solidFill>
-                    <a:lnL w="6350" cap="flat" cmpd="sng">
-                      <a:solidFill>
-                        <a:srgbClr val="E0E0E0"/>
-                      </a:solidFill>
-                    </a:lnL>
-                    <a:lnR w="6350" cap="flat" cmpd="sng">
-                      <a:solidFill>
-                        <a:srgbClr val="E0E0E0"/>
-                      </a:solidFill>
-                    </a:lnR>
-                    <a:lnT w="6350" cap="flat" cmpd="sng">
-                      <a:solidFill>
-                        <a:srgbClr val="E0E0E0"/>
-                      </a:solidFill>
-                    </a:lnT>
-                    <a:lnB w="6350" cap="flat" cmpd="sng">
-                      <a:solidFill>
-                        <a:srgbClr val="E0E0E0"/>
-                      </a:solidFill>
-                    </a:lnB>
                   </a:tcPr>
                 </a:tc>
                 <a:tc>
@@ -6059,7 +5933,7 @@
                           </a:solidFill>
                           <a:latin typeface="Calibri"/>
                         </a:rPr>
-                        <a:t>Unlimited</a:t>
+                        <a:t>$58.7B</a:t>
                       </a:r>
                     </a:p>
                   </a:txBody>
@@ -6067,30 +5941,10 @@
                     <a:solidFill>
                       <a:srgbClr val="FFFFFF"/>
                     </a:solidFill>
-                    <a:lnL w="6350" cap="flat" cmpd="sng">
-                      <a:solidFill>
-                        <a:srgbClr val="E0E0E0"/>
-                      </a:solidFill>
-                    </a:lnL>
-                    <a:lnR w="6350" cap="flat" cmpd="sng">
-                      <a:solidFill>
-                        <a:srgbClr val="E0E0E0"/>
-                      </a:solidFill>
-                    </a:lnR>
-                    <a:lnT w="6350" cap="flat" cmpd="sng">
-                      <a:solidFill>
-                        <a:srgbClr val="E0E0E0"/>
-                      </a:solidFill>
-                    </a:lnT>
-                    <a:lnB w="6350" cap="flat" cmpd="sng">
-                      <a:solidFill>
-                        <a:srgbClr val="E0E0E0"/>
-                      </a:solidFill>
-                    </a:lnB>
                   </a:tcPr>
                 </a:tc>
               </a:tr>
-              <a:tr h="1005840">
+              <a:tr h="877824">
                 <a:tc>
                   <a:txBody>
                     <a:bodyPr/>
@@ -6104,7 +5958,7 @@
                           </a:solidFill>
                           <a:latin typeface="Calibri"/>
                         </a:rPr>
-                        <a:t>Users</a:t>
+                        <a:t>Mac</a:t>
                       </a:r>
                     </a:p>
                   </a:txBody>
@@ -6112,26 +5966,6 @@
                     <a:solidFill>
                       <a:srgbClr val="F5F5F7"/>
                     </a:solidFill>
-                    <a:lnL w="6350" cap="flat" cmpd="sng">
-                      <a:solidFill>
-                        <a:srgbClr val="E0E0E0"/>
-                      </a:solidFill>
-                    </a:lnL>
-                    <a:lnR w="6350" cap="flat" cmpd="sng">
-                      <a:solidFill>
-                        <a:srgbClr val="E0E0E0"/>
-                      </a:solidFill>
-                    </a:lnR>
-                    <a:lnT w="6350" cap="flat" cmpd="sng">
-                      <a:solidFill>
-                        <a:srgbClr val="E0E0E0"/>
-                      </a:solidFill>
-                    </a:lnT>
-                    <a:lnB w="6350" cap="flat" cmpd="sng">
-                      <a:solidFill>
-                        <a:srgbClr val="E0E0E0"/>
-                      </a:solidFill>
-                    </a:lnB>
                   </a:tcPr>
                 </a:tc>
                 <a:tc>
@@ -6147,7 +5981,7 @@
                           </a:solidFill>
                           <a:latin typeface="Calibri"/>
                         </a:rPr>
-                        <a:t>1</a:t>
+                        <a:t>$7.2B</a:t>
                       </a:r>
                     </a:p>
                   </a:txBody>
@@ -6155,26 +5989,6 @@
                     <a:solidFill>
                       <a:srgbClr val="F5F5F7"/>
                     </a:solidFill>
-                    <a:lnL w="6350" cap="flat" cmpd="sng">
-                      <a:solidFill>
-                        <a:srgbClr val="E0E0E0"/>
-                      </a:solidFill>
-                    </a:lnL>
-                    <a:lnR w="6350" cap="flat" cmpd="sng">
-                      <a:solidFill>
-                        <a:srgbClr val="E0E0E0"/>
-                      </a:solidFill>
-                    </a:lnR>
-                    <a:lnT w="6350" cap="flat" cmpd="sng">
-                      <a:solidFill>
-                        <a:srgbClr val="E0E0E0"/>
-                      </a:solidFill>
-                    </a:lnT>
-                    <a:lnB w="6350" cap="flat" cmpd="sng">
-                      <a:solidFill>
-                        <a:srgbClr val="E0E0E0"/>
-                      </a:solidFill>
-                    </a:lnB>
                   </a:tcPr>
                 </a:tc>
                 <a:tc>
@@ -6190,7 +6004,7 @@
                           </a:solidFill>
                           <a:latin typeface="Calibri"/>
                         </a:rPr>
-                        <a:t>10</a:t>
+                        <a:t>$8.0B</a:t>
                       </a:r>
                     </a:p>
                   </a:txBody>
@@ -6198,26 +6012,6 @@
                     <a:solidFill>
                       <a:srgbClr val="F5F5F7"/>
                     </a:solidFill>
-                    <a:lnL w="6350" cap="flat" cmpd="sng">
-                      <a:solidFill>
-                        <a:srgbClr val="E0E0E0"/>
-                      </a:solidFill>
-                    </a:lnL>
-                    <a:lnR w="6350" cap="flat" cmpd="sng">
-                      <a:solidFill>
-                        <a:srgbClr val="E0E0E0"/>
-                      </a:solidFill>
-                    </a:lnR>
-                    <a:lnT w="6350" cap="flat" cmpd="sng">
-                      <a:solidFill>
-                        <a:srgbClr val="E0E0E0"/>
-                      </a:solidFill>
-                    </a:lnT>
-                    <a:lnB w="6350" cap="flat" cmpd="sng">
-                      <a:solidFill>
-                        <a:srgbClr val="E0E0E0"/>
-                      </a:solidFill>
-                    </a:lnB>
                   </a:tcPr>
                 </a:tc>
                 <a:tc>
@@ -6233,7 +6027,7 @@
                           </a:solidFill>
                           <a:latin typeface="Calibri"/>
                         </a:rPr>
-                        <a:t>Unlimited</a:t>
+                        <a:t>$9.3B</a:t>
                       </a:r>
                     </a:p>
                   </a:txBody>
@@ -6241,30 +6035,10 @@
                     <a:solidFill>
                       <a:srgbClr val="F5F5F7"/>
                     </a:solidFill>
-                    <a:lnL w="6350" cap="flat" cmpd="sng">
-                      <a:solidFill>
-                        <a:srgbClr val="E0E0E0"/>
-                      </a:solidFill>
-                    </a:lnL>
-                    <a:lnR w="6350" cap="flat" cmpd="sng">
-                      <a:solidFill>
-                        <a:srgbClr val="E0E0E0"/>
-                      </a:solidFill>
-                    </a:lnR>
-                    <a:lnT w="6350" cap="flat" cmpd="sng">
-                      <a:solidFill>
-                        <a:srgbClr val="E0E0E0"/>
-                      </a:solidFill>
-                    </a:lnT>
-                    <a:lnB w="6350" cap="flat" cmpd="sng">
-                      <a:solidFill>
-                        <a:srgbClr val="E0E0E0"/>
-                      </a:solidFill>
-                    </a:lnB>
                   </a:tcPr>
                 </a:tc>
               </a:tr>
-              <a:tr h="1005840">
+              <a:tr h="877824">
                 <a:tc>
                   <a:txBody>
                     <a:bodyPr/>
@@ -6278,7 +6052,7 @@
                           </a:solidFill>
                           <a:latin typeface="Calibri"/>
                         </a:rPr>
-                        <a:t>Support</a:t>
+                        <a:t>iPad</a:t>
                       </a:r>
                     </a:p>
                   </a:txBody>
@@ -6286,26 +6060,6 @@
                     <a:solidFill>
                       <a:srgbClr val="FFFFFF"/>
                     </a:solidFill>
-                    <a:lnL w="6350" cap="flat" cmpd="sng">
-                      <a:solidFill>
-                        <a:srgbClr val="E0E0E0"/>
-                      </a:solidFill>
-                    </a:lnL>
-                    <a:lnR w="6350" cap="flat" cmpd="sng">
-                      <a:solidFill>
-                        <a:srgbClr val="E0E0E0"/>
-                      </a:solidFill>
-                    </a:lnR>
-                    <a:lnT w="6350" cap="flat" cmpd="sng">
-                      <a:solidFill>
-                        <a:srgbClr val="E0E0E0"/>
-                      </a:solidFill>
-                    </a:lnT>
-                    <a:lnB w="6350" cap="flat" cmpd="sng">
-                      <a:solidFill>
-                        <a:srgbClr val="E0E0E0"/>
-                      </a:solidFill>
-                    </a:lnB>
                   </a:tcPr>
                 </a:tc>
                 <a:tc>
@@ -6321,7 +6075,7 @@
                           </a:solidFill>
                           <a:latin typeface="Calibri"/>
                         </a:rPr>
-                        <a:t>Email</a:t>
+                        <a:t>$5.6B</a:t>
                       </a:r>
                     </a:p>
                   </a:txBody>
@@ -6329,26 +6083,6 @@
                     <a:solidFill>
                       <a:srgbClr val="FFFFFF"/>
                     </a:solidFill>
-                    <a:lnL w="6350" cap="flat" cmpd="sng">
-                      <a:solidFill>
-                        <a:srgbClr val="E0E0E0"/>
-                      </a:solidFill>
-                    </a:lnL>
-                    <a:lnR w="6350" cap="flat" cmpd="sng">
-                      <a:solidFill>
-                        <a:srgbClr val="E0E0E0"/>
-                      </a:solidFill>
-                    </a:lnR>
-                    <a:lnT w="6350" cap="flat" cmpd="sng">
-                      <a:solidFill>
-                        <a:srgbClr val="E0E0E0"/>
-                      </a:solidFill>
-                    </a:lnT>
-                    <a:lnB w="6350" cap="flat" cmpd="sng">
-                      <a:solidFill>
-                        <a:srgbClr val="E0E0E0"/>
-                      </a:solidFill>
-                    </a:lnB>
                   </a:tcPr>
                 </a:tc>
                 <a:tc>
@@ -6364,7 +6098,7 @@
                           </a:solidFill>
                           <a:latin typeface="Calibri"/>
                         </a:rPr>
-                        <a:t>Priority</a:t>
+                        <a:t>$6.1B</a:t>
                       </a:r>
                     </a:p>
                   </a:txBody>
@@ -6372,26 +6106,6 @@
                     <a:solidFill>
                       <a:srgbClr val="FFFFFF"/>
                     </a:solidFill>
-                    <a:lnL w="6350" cap="flat" cmpd="sng">
-                      <a:solidFill>
-                        <a:srgbClr val="E0E0E0"/>
-                      </a:solidFill>
-                    </a:lnL>
-                    <a:lnR w="6350" cap="flat" cmpd="sng">
-                      <a:solidFill>
-                        <a:srgbClr val="E0E0E0"/>
-                      </a:solidFill>
-                    </a:lnR>
-                    <a:lnT w="6350" cap="flat" cmpd="sng">
-                      <a:solidFill>
-                        <a:srgbClr val="E0E0E0"/>
-                      </a:solidFill>
-                    </a:lnT>
-                    <a:lnB w="6350" cap="flat" cmpd="sng">
-                      <a:solidFill>
-                        <a:srgbClr val="E0E0E0"/>
-                      </a:solidFill>
-                    </a:lnB>
                   </a:tcPr>
                 </a:tc>
                 <a:tc>
@@ -6407,7 +6121,7 @@
                           </a:solidFill>
                           <a:latin typeface="Calibri"/>
                         </a:rPr>
-                        <a:t>Dedicated</a:t>
+                        <a:t>$6.9B</a:t>
                       </a:r>
                     </a:p>
                   </a:txBody>
@@ -6415,30 +6129,10 @@
                     <a:solidFill>
                       <a:srgbClr val="FFFFFF"/>
                     </a:solidFill>
-                    <a:lnL w="6350" cap="flat" cmpd="sng">
-                      <a:solidFill>
-                        <a:srgbClr val="E0E0E0"/>
-                      </a:solidFill>
-                    </a:lnL>
-                    <a:lnR w="6350" cap="flat" cmpd="sng">
-                      <a:solidFill>
-                        <a:srgbClr val="E0E0E0"/>
-                      </a:solidFill>
-                    </a:lnR>
-                    <a:lnT w="6350" cap="flat" cmpd="sng">
-                      <a:solidFill>
-                        <a:srgbClr val="E0E0E0"/>
-                      </a:solidFill>
-                    </a:lnT>
-                    <a:lnB w="6350" cap="flat" cmpd="sng">
-                      <a:solidFill>
-                        <a:srgbClr val="E0E0E0"/>
-                      </a:solidFill>
-                    </a:lnB>
                   </a:tcPr>
                 </a:tc>
               </a:tr>
-              <a:tr h="1005840">
+              <a:tr h="877824">
                 <a:tc>
                   <a:txBody>
                     <a:bodyPr/>
@@ -6452,7 +6146,7 @@
                           </a:solidFill>
                           <a:latin typeface="Calibri"/>
                         </a:rPr>
-                        <a:t>API Access</a:t>
+                        <a:t>Wearables</a:t>
                       </a:r>
                     </a:p>
                   </a:txBody>
@@ -6460,26 +6154,6 @@
                     <a:solidFill>
                       <a:srgbClr val="F5F5F7"/>
                     </a:solidFill>
-                    <a:lnL w="6350" cap="flat" cmpd="sng">
-                      <a:solidFill>
-                        <a:srgbClr val="E0E0E0"/>
-                      </a:solidFill>
-                    </a:lnL>
-                    <a:lnR w="6350" cap="flat" cmpd="sng">
-                      <a:solidFill>
-                        <a:srgbClr val="E0E0E0"/>
-                      </a:solidFill>
-                    </a:lnR>
-                    <a:lnT w="6350" cap="flat" cmpd="sng">
-                      <a:solidFill>
-                        <a:srgbClr val="E0E0E0"/>
-                      </a:solidFill>
-                    </a:lnT>
-                    <a:lnB w="6350" cap="flat" cmpd="sng">
-                      <a:solidFill>
-                        <a:srgbClr val="E0E0E0"/>
-                      </a:solidFill>
-                    </a:lnB>
                   </a:tcPr>
                 </a:tc>
                 <a:tc>
@@ -6495,7 +6169,7 @@
                           </a:solidFill>
                           <a:latin typeface="Calibri"/>
                         </a:rPr>
-                        <a:t>Limited</a:t>
+                        <a:t>$9.8B</a:t>
                       </a:r>
                     </a:p>
                   </a:txBody>
@@ -6503,26 +6177,6 @@
                     <a:solidFill>
                       <a:srgbClr val="F5F5F7"/>
                     </a:solidFill>
-                    <a:lnL w="6350" cap="flat" cmpd="sng">
-                      <a:solidFill>
-                        <a:srgbClr val="E0E0E0"/>
-                      </a:solidFill>
-                    </a:lnL>
-                    <a:lnR w="6350" cap="flat" cmpd="sng">
-                      <a:solidFill>
-                        <a:srgbClr val="E0E0E0"/>
-                      </a:solidFill>
-                    </a:lnR>
-                    <a:lnT w="6350" cap="flat" cmpd="sng">
-                      <a:solidFill>
-                        <a:srgbClr val="E0E0E0"/>
-                      </a:solidFill>
-                    </a:lnT>
-                    <a:lnB w="6350" cap="flat" cmpd="sng">
-                      <a:solidFill>
-                        <a:srgbClr val="E0E0E0"/>
-                      </a:solidFill>
-                    </a:lnB>
                   </a:tcPr>
                 </a:tc>
                 <a:tc>
@@ -6538,7 +6192,7 @@
                           </a:solidFill>
                           <a:latin typeface="Calibri"/>
                         </a:rPr>
-                        <a:t>Full</a:t>
+                        <a:t>$10.2B</a:t>
                       </a:r>
                     </a:p>
                   </a:txBody>
@@ -6546,26 +6200,6 @@
                     <a:solidFill>
                       <a:srgbClr val="F5F5F7"/>
                     </a:solidFill>
-                    <a:lnL w="6350" cap="flat" cmpd="sng">
-                      <a:solidFill>
-                        <a:srgbClr val="E0E0E0"/>
-                      </a:solidFill>
-                    </a:lnL>
-                    <a:lnR w="6350" cap="flat" cmpd="sng">
-                      <a:solidFill>
-                        <a:srgbClr val="E0E0E0"/>
-                      </a:solidFill>
-                    </a:lnR>
-                    <a:lnT w="6350" cap="flat" cmpd="sng">
-                      <a:solidFill>
-                        <a:srgbClr val="E0E0E0"/>
-                      </a:solidFill>
-                    </a:lnT>
-                    <a:lnB w="6350" cap="flat" cmpd="sng">
-                      <a:solidFill>
-                        <a:srgbClr val="E0E0E0"/>
-                      </a:solidFill>
-                    </a:lnB>
                   </a:tcPr>
                 </a:tc>
                 <a:tc>
@@ -6581,7 +6215,7 @@
                           </a:solidFill>
                           <a:latin typeface="Calibri"/>
                         </a:rPr>
-                        <a:t>Full + SLA</a:t>
+                        <a:t>$11.1B</a:t>
                       </a:r>
                     </a:p>
                   </a:txBody>
@@ -6589,26 +6223,6 @@
                     <a:solidFill>
                       <a:srgbClr val="F5F5F7"/>
                     </a:solidFill>
-                    <a:lnL w="6350" cap="flat" cmpd="sng">
-                      <a:solidFill>
-                        <a:srgbClr val="E0E0E0"/>
-                      </a:solidFill>
-                    </a:lnL>
-                    <a:lnR w="6350" cap="flat" cmpd="sng">
-                      <a:solidFill>
-                        <a:srgbClr val="E0E0E0"/>
-                      </a:solidFill>
-                    </a:lnR>
-                    <a:lnT w="6350" cap="flat" cmpd="sng">
-                      <a:solidFill>
-                        <a:srgbClr val="E0E0E0"/>
-                      </a:solidFill>
-                    </a:lnT>
-                    <a:lnB w="6350" cap="flat" cmpd="sng">
-                      <a:solidFill>
-                        <a:srgbClr val="E0E0E0"/>
-                      </a:solidFill>
-                    </a:lnB>
                   </a:tcPr>
                 </a:tc>
               </a:tr>
